--- a/system-design-101/vi/lessons/sd-13-018/slides/sd-13-018.pptx
+++ b/system-design-101/vi/lessons/sd-13-018/slides/sd-13-018.pptx
@@ -1798,7 +1798,7 @@
         <p:spPr>
           <a:xfrm>
             <a:off x="914400" y="1333500"/>
-            <a:ext cx="15716250" cy="2857500"/>
+            <a:ext cx="16459200" cy="3429000"/>
           </a:xfrm>
           <a:prstGeom prst="rect">
             <a:avLst/>
@@ -1807,17 +1807,17 @@
           <a:ln/>
         </p:spPr>
         <p:txBody>
-          <a:bodyPr wrap="square" lIns="0" tIns="49089" rIns="0" bIns="-49089" rtlCol="0" anchor="t"/>
+          <a:bodyPr wrap="square" lIns="0" tIns="61722" rIns="0" bIns="-61722" rtlCol="0" anchor="t"/>
           <a:lstStyle/>
           <a:p>
             <a:pPr algn="l" indent="0" marL="0">
               <a:lnSpc>
-                <a:spcPts val="6956"/>
+                <a:spcPts val="8748"/>
               </a:lnSpc>
               <a:buNone/>
             </a:pPr>
             <a:r>
-              <a:rPr lang="en-US" sz="6441" dirty="0" spc="-73" kern="0">
+              <a:rPr lang="en-US" sz="8100" dirty="0" spc="-89" kern="0">
                 <a:solidFill>
                   <a:srgbClr val="F3EEE3"/>
                 </a:solidFill>
@@ -1828,7 +1828,7 @@
               <a:t>Terraform</a:t>
             </a:r>
             <a:r>
-              <a:rPr lang="en-US" sz="6441" dirty="0" spc="-1" kern="0">
+              <a:rPr lang="en-US" sz="8100" dirty="0" spc="1" kern="0">
                 <a:solidFill>
                   <a:srgbClr val="F3EEE3"/>
                 </a:solidFill>
@@ -1839,7 +1839,7 @@
               <a:t> plan</a:t>
             </a:r>
             <a:r>
-              <a:rPr lang="en-US" sz="6441" dirty="0" spc="-5" kern="0">
+              <a:rPr lang="en-US" sz="8100" dirty="0" spc="-4" kern="0">
                 <a:solidFill>
                   <a:srgbClr val="F3EEE3"/>
                 </a:solidFill>
@@ -1850,7 +1850,7 @@
               <a:t> báo</a:t>
             </a:r>
             <a:r>
-              <a:rPr lang="en-US" sz="6441" dirty="0" spc="-3" kern="0">
+              <a:rPr lang="en-US" sz="8100" dirty="0" spc="2" kern="0">
                 <a:solidFill>
                   <a:srgbClr val="F3EEE3"/>
                 </a:solidFill>
@@ -1861,7 +1861,7 @@
               <a:t> thay</a:t>
             </a:r>
             <a:r>
-              <a:rPr lang="en-US" sz="6441" dirty="0" spc="10" kern="0">
+              <a:rPr lang="en-US" sz="8100" dirty="0" spc="15" kern="0">
                 <a:solidFill>
                   <a:srgbClr val="F3EEE3"/>
                 </a:solidFill>
@@ -1872,7 +1872,7 @@
               <a:t> đổi</a:t>
             </a:r>
             <a:r>
-              <a:rPr lang="en-US" sz="6441" dirty="0" spc="-7" kern="0">
+              <a:rPr lang="en-US" sz="8100" dirty="0" spc="-4" kern="0">
                 <a:solidFill>
                   <a:srgbClr val="F3EEE3"/>
                 </a:solidFill>
@@ -1883,7 +1883,7 @@
               <a:t> bạn</a:t>
             </a:r>
             <a:r>
-              <a:rPr lang="en-US" sz="6441" dirty="0" spc="-3" kern="0">
+              <a:rPr lang="en-US" sz="8100" dirty="0" spc="-1" kern="0">
                 <a:solidFill>
                   <a:srgbClr val="F3EEE3"/>
                 </a:solidFill>
@@ -1894,7 +1894,7 @@
               <a:t> không</a:t>
             </a:r>
             <a:r>
-              <a:rPr lang="en-US" sz="6441" dirty="0" spc="16" kern="0">
+              <a:rPr lang="en-US" sz="8100" dirty="0" spc="25" kern="0">
                 <a:solidFill>
                   <a:srgbClr val="F3EEE3"/>
                 </a:solidFill>
@@ -1905,7 +1905,7 @@
               <a:t> định</a:t>
             </a:r>
             <a:r>
-              <a:rPr lang="en-US" sz="6441" dirty="0" spc="-3" kern="0">
+              <a:rPr lang="en-US" sz="8100" dirty="0" spc="-2" kern="0">
                 <a:solidFill>
                   <a:srgbClr val="F3EEE3"/>
                 </a:solidFill>
@@ -1916,7 +1916,7 @@
               <a:t> làm:</a:t>
             </a:r>
             <a:r>
-              <a:rPr lang="en-US" sz="6441" dirty="0" spc="-1" kern="0">
+              <a:rPr lang="en-US" sz="8100" dirty="0" spc="2" kern="0">
                 <a:solidFill>
                   <a:srgbClr val="F3EEE3"/>
                 </a:solidFill>
@@ -1924,10 +1924,10 @@
                 <a:ea typeface="Bricolage Grotesque ExtraBold" pitchFamily="34" charset="-122"/>
                 <a:cs typeface="Bricolage Grotesque ExtraBold" pitchFamily="34" charset="-120"/>
               </a:rPr>
-              <a:t> năm</a:t>
-            </a:r>
-            <a:r>
-              <a:rPr lang="en-US" sz="6441" dirty="0" spc="-2" kern="0">
+              <a:t> năm nguyên</a:t>
+            </a:r>
+            <a:r>
+              <a:rPr lang="en-US" sz="8100" dirty="0" spc="0" kern="0">
                 <a:solidFill>
                   <a:srgbClr val="F3EEE3"/>
                 </a:solidFill>
@@ -1935,20 +1935,9 @@
                 <a:ea typeface="Bricolage Grotesque ExtraBold" pitchFamily="34" charset="-122"/>
                 <a:cs typeface="Bricolage Grotesque ExtraBold" pitchFamily="34" charset="-120"/>
               </a:rPr>
-              <a:t> nguyên</a:t>
-            </a:r>
-            <a:r>
-              <a:rPr lang="en-US" sz="6441" dirty="0" spc="-4" kern="0">
-                <a:solidFill>
-                  <a:srgbClr val="F3EEE3"/>
-                </a:solidFill>
-                <a:latin typeface="Bricolage Grotesque ExtraBold" pitchFamily="34" charset="0"/>
-                <a:ea typeface="Bricolage Grotesque ExtraBold" pitchFamily="34" charset="-122"/>
-                <a:cs typeface="Bricolage Grotesque ExtraBold" pitchFamily="34" charset="-120"/>
-              </a:rPr>
               <a:t> nhân</a:t>
             </a:r>
-            <a:endParaRPr lang="en-US" sz="6441" dirty="0"/>
+            <a:endParaRPr lang="en-US" sz="8100" dirty="0"/>
           </a:p>
         </p:txBody>
       </p:sp>
@@ -1960,7 +1949,7 @@
         </p:nvSpPr>
         <p:spPr>
           <a:xfrm>
-            <a:off x="914400" y="4572000"/>
+            <a:off x="914400" y="4953000"/>
             <a:ext cx="16459200" cy="533400"/>
           </a:xfrm>
           <a:prstGeom prst="rect">
@@ -2793,101 +2782,7 @@
       </p:sp>
       <p:sp>
         <p:nvSpPr>
-          <p:cNvPr id="20" name="Text 18"/>
-          <p:cNvSpPr/>
-          <p:nvPr/>
-        </p:nvSpPr>
-        <p:spPr>
-          <a:xfrm>
-            <a:off x="914400" y="9525000"/>
-            <a:ext cx="8572500" cy="342900"/>
-          </a:xfrm>
-          <a:prstGeom prst="rect">
-            <a:avLst/>
-          </a:prstGeom>
-          <a:noFill/>
-          <a:ln/>
-        </p:spPr>
-        <p:txBody>
-          <a:bodyPr wrap="square" lIns="0" tIns="0" rIns="0" bIns="0" rtlCol="0" anchor="t"/>
-          <a:lstStyle/>
-          <a:p>
-            <a:pPr algn="l" indent="0" marL="0">
-              <a:buNone/>
-            </a:pPr>
-            <a:r>
-              <a:rPr lang="en-US" sz="1800" dirty="0" spc="-13" kern="0">
-                <a:solidFill>
-                  <a:srgbClr val="9AA0B5"/>
-                </a:solidFill>
-                <a:latin typeface="Be Vietnam Pro" pitchFamily="34" charset="0"/>
-                <a:ea typeface="Be Vietnam Pro" pitchFamily="34" charset="-122"/>
-                <a:cs typeface="Be Vietnam Pro" pitchFamily="34" charset="-120"/>
-              </a:rPr>
-              <a:t>System</a:t>
-            </a:r>
-            <a:r>
-              <a:rPr lang="en-US" sz="1800" dirty="0" spc="-1" kern="0">
-                <a:solidFill>
-                  <a:srgbClr val="9AA0B5"/>
-                </a:solidFill>
-                <a:latin typeface="Be Vietnam Pro" pitchFamily="34" charset="0"/>
-                <a:ea typeface="Be Vietnam Pro" pitchFamily="34" charset="-122"/>
-                <a:cs typeface="Be Vietnam Pro" pitchFamily="34" charset="-120"/>
-              </a:rPr>
-              <a:t> Design</a:t>
-            </a:r>
-            <a:r>
-              <a:rPr lang="en-US" sz="1800" dirty="0" spc="4" kern="0">
-                <a:solidFill>
-                  <a:srgbClr val="9AA0B5"/>
-                </a:solidFill>
-                <a:latin typeface="Be Vietnam Pro" pitchFamily="34" charset="0"/>
-                <a:ea typeface="Be Vietnam Pro" pitchFamily="34" charset="-122"/>
-                <a:cs typeface="Be Vietnam Pro" pitchFamily="34" charset="-120"/>
-              </a:rPr>
-              <a:t> 101</a:t>
-            </a:r>
-            <a:r>
-              <a:rPr lang="en-US" sz="1800" dirty="0" spc="-2" kern="0">
-                <a:solidFill>
-                  <a:srgbClr val="9AA0B5"/>
-                </a:solidFill>
-                <a:latin typeface="Be Vietnam Pro" pitchFamily="34" charset="0"/>
-                <a:ea typeface="Be Vietnam Pro" pitchFamily="34" charset="-122"/>
-                <a:cs typeface="Be Vietnam Pro" pitchFamily="34" charset="-120"/>
-              </a:rPr>
-              <a:t> ·</a:t>
-            </a:r>
-            <a:r>
-              <a:rPr lang="en-US" sz="1800" dirty="0" spc="1" kern="0">
-                <a:solidFill>
-                  <a:srgbClr val="9AA0B5"/>
-                </a:solidFill>
-                <a:latin typeface="Be Vietnam Pro" pitchFamily="34" charset="0"/>
-                <a:ea typeface="Be Vietnam Pro" pitchFamily="34" charset="-122"/>
-                <a:cs typeface="Be Vietnam Pro" pitchFamily="34" charset="-120"/>
-              </a:rPr>
-              <a:t> Bài</a:t>
-            </a:r>
-            <a:r>
-              <a:rPr lang="en-US" sz="1800" dirty="0" spc="3" kern="0">
-                <a:solidFill>
-                  <a:srgbClr val="9AA0B5"/>
-                </a:solidFill>
-                <a:latin typeface="Be Vietnam Pro" pitchFamily="34" charset="0"/>
-                <a:ea typeface="Be Vietnam Pro" pitchFamily="34" charset="-122"/>
-                <a:cs typeface="Be Vietnam Pro" pitchFamily="34" charset="-120"/>
-              </a:rPr>
-              <a:t> 18</a:t>
-            </a:r>
-            <a:endParaRPr lang="en-US" sz="1800" dirty="0"/>
-          </a:p>
-        </p:txBody>
-      </p:sp>
-      <p:sp>
-        <p:nvSpPr>
-          <p:cNvPr id="21" name="Shape 19"/>
+          <p:cNvPr id="20" name="Shape 18"/>
           <p:cNvSpPr/>
           <p:nvPr/>
         </p:nvSpPr>
@@ -2911,7 +2806,7 @@
       </p:sp>
       <p:pic>
         <p:nvPicPr>
-          <p:cNvPr id="22" name="Moda image moda-export-watermark-b5c5b672-3829-48cb-b59d-f80d5b76c53f" descr="">    </p:cNvPr>
+          <p:cNvPr id="21" name="Moda image moda-export-watermark-b5c5b672-3829-48cb-b59d-f80d5b76c53f" descr="">    </p:cNvPr>
           <p:cNvPicPr>
             <a:picLocks noChangeAspect="1"/>
           </p:cNvPicPr>
@@ -5763,6 +5658,72 @@
               <a:t>Provider</a:t>
             </a:r>
             <a:r>
+              <a:rPr lang="en-US" sz="2700" dirty="0" spc="-5" kern="0">
+                <a:solidFill>
+                  <a:srgbClr val="14161C"/>
+                </a:solidFill>
+                <a:latin typeface="Be Vietnam Pro" pitchFamily="34" charset="0"/>
+                <a:ea typeface="Be Vietnam Pro" pitchFamily="34" charset="-122"/>
+                <a:cs typeface="Be Vietnam Pro" pitchFamily="34" charset="-120"/>
+              </a:rPr>
+              <a:t> khóa</a:t>
+            </a:r>
+            <a:r>
+              <a:rPr lang="en-US" sz="2700" dirty="0" spc="-4" kern="0">
+                <a:solidFill>
+                  <a:srgbClr val="14161C"/>
+                </a:solidFill>
+                <a:latin typeface="Be Vietnam Pro" pitchFamily="34" charset="0"/>
+                <a:ea typeface="Be Vietnam Pro" pitchFamily="34" charset="-122"/>
+                <a:cs typeface="Be Vietnam Pro" pitchFamily="34" charset="-120"/>
+              </a:rPr>
+              <a:t> bằng</a:t>
+            </a:r>
+            <a:r>
+              <a:rPr lang="en-US" sz="2700" dirty="0" spc="-14" kern="0">
+                <a:solidFill>
+                  <a:srgbClr val="14161C"/>
+                </a:solidFill>
+                <a:latin typeface="Be Vietnam Pro" pitchFamily="34" charset="0"/>
+                <a:ea typeface="Be Vietnam Pro" pitchFamily="34" charset="-122"/>
+                <a:cs typeface="Be Vietnam Pro" pitchFamily="34" charset="-120"/>
+              </a:rPr>
+              <a:t> .terraform.lock.hcl;</a:t>
+            </a:r>
+            <a:r>
+              <a:rPr lang="en-US" sz="2700" dirty="0" spc="-2" kern="0">
+                <a:solidFill>
+                  <a:srgbClr val="14161C"/>
+                </a:solidFill>
+                <a:latin typeface="Be Vietnam Pro" pitchFamily="34" charset="0"/>
+                <a:ea typeface="Be Vietnam Pro" pitchFamily="34" charset="-122"/>
+                <a:cs typeface="Be Vietnam Pro" pitchFamily="34" charset="-120"/>
+              </a:rPr>
+              <a:t> module</a:t>
+            </a:r>
+            <a:r>
+              <a:rPr lang="en-US" sz="2700" dirty="0" spc="0" kern="0">
+                <a:solidFill>
+                  <a:srgbClr val="14161C"/>
+                </a:solidFill>
+                <a:latin typeface="Be Vietnam Pro" pitchFamily="34" charset="0"/>
+                <a:ea typeface="Be Vietnam Pro" pitchFamily="34" charset="-122"/>
+                <a:cs typeface="Be Vietnam Pro" pitchFamily="34" charset="-120"/>
+              </a:rPr>
+              <a:t> cần</a:t>
+            </a:r>
+            <a:r>
+              <a:rPr lang="en-US" sz="2700" dirty="0" spc="-24" kern="0">
+                <a:solidFill>
+                  <a:srgbClr val="14161C"/>
+                </a:solidFill>
+                <a:latin typeface="Be Vietnam Pro" pitchFamily="34" charset="0"/>
+                <a:ea typeface="Be Vietnam Pro" pitchFamily="34" charset="-122"/>
+                <a:cs typeface="Be Vietnam Pro" pitchFamily="34" charset="-120"/>
+              </a:rPr>
+              <a:t> ràng</a:t>
+            </a:r>
+            <a:r>
               <a:rPr lang="en-US" sz="2700" dirty="0" spc="-3" kern="0">
                 <a:solidFill>
                   <a:srgbClr val="14161C"/>
@@ -5771,73 +5732,29 @@
                 <a:ea typeface="Be Vietnam Pro" pitchFamily="34" charset="-122"/>
                 <a:cs typeface="Be Vietnam Pro" pitchFamily="34" charset="-120"/>
               </a:rPr>
-              <a:t> hoặc</a:t>
-            </a:r>
-            <a:r>
-              <a:rPr lang="en-US" sz="2700" dirty="0" spc="-2" kern="0">
-                <a:solidFill>
-                  <a:srgbClr val="14161C"/>
-                </a:solidFill>
-                <a:latin typeface="Be Vietnam Pro" pitchFamily="34" charset="0"/>
-                <a:ea typeface="Be Vietnam Pro" pitchFamily="34" charset="-122"/>
-                <a:cs typeface="Be Vietnam Pro" pitchFamily="34" charset="-120"/>
-              </a:rPr>
-              <a:t> module mới</a:t>
-            </a:r>
-            <a:r>
-              <a:rPr lang="en-US" sz="2700" dirty="0" spc="12" kern="0">
-                <a:solidFill>
-                  <a:srgbClr val="14161C"/>
-                </a:solidFill>
-                <a:latin typeface="Be Vietnam Pro" pitchFamily="34" charset="0"/>
-                <a:ea typeface="Be Vietnam Pro" pitchFamily="34" charset="-122"/>
-                <a:cs typeface="Be Vietnam Pro" pitchFamily="34" charset="-120"/>
-              </a:rPr>
-              <a:t> đổi</a:t>
-            </a:r>
-            <a:r>
-              <a:rPr lang="en-US" sz="2700" dirty="0" spc="0" kern="0">
-                <a:solidFill>
-                  <a:srgbClr val="14161C"/>
-                </a:solidFill>
-                <a:latin typeface="Be Vietnam Pro" pitchFamily="34" charset="0"/>
-                <a:ea typeface="Be Vietnam Pro" pitchFamily="34" charset="-122"/>
-                <a:cs typeface="Be Vietnam Pro" pitchFamily="34" charset="-120"/>
-              </a:rPr>
-              <a:t> mặc</a:t>
-            </a:r>
-            <a:r>
-              <a:rPr lang="en-US" sz="2700" dirty="0" spc="17" kern="0">
-                <a:solidFill>
-                  <a:srgbClr val="14161C"/>
-                </a:solidFill>
-                <a:latin typeface="Be Vietnam Pro" pitchFamily="34" charset="0"/>
-                <a:ea typeface="Be Vietnam Pro" pitchFamily="34" charset="-122"/>
-                <a:cs typeface="Be Vietnam Pro" pitchFamily="34" charset="-120"/>
-              </a:rPr>
-              <a:t> định;</a:t>
-            </a:r>
-            <a:r>
-              <a:rPr lang="en-US" sz="2700" dirty="0" spc="-5" kern="0">
-                <a:solidFill>
-                  <a:srgbClr val="14161C"/>
-                </a:solidFill>
-                <a:latin typeface="Be Vietnam Pro" pitchFamily="34" charset="0"/>
-                <a:ea typeface="Be Vietnam Pro" pitchFamily="34" charset="-122"/>
-                <a:cs typeface="Be Vietnam Pro" pitchFamily="34" charset="-120"/>
-              </a:rPr>
-              <a:t> khóa bằng</a:t>
-            </a:r>
-            <a:r>
-              <a:rPr lang="en-US" sz="2700" dirty="0" spc="-14" kern="0">
-                <a:solidFill>
-                  <a:srgbClr val="14161C"/>
-                </a:solidFill>
-                <a:latin typeface="Be Vietnam Pro" pitchFamily="34" charset="0"/>
-                <a:ea typeface="Be Vietnam Pro" pitchFamily="34" charset="-122"/>
-                <a:cs typeface="Be Vietnam Pro" pitchFamily="34" charset="-120"/>
-              </a:rPr>
-              <a:t> .terraform.lock.hcl.</a:t>
+              <a:t> buộc</a:t>
+            </a:r>
+            <a:r>
+              <a:rPr lang="en-US" sz="2700" dirty="0" spc="-8" kern="0">
+                <a:solidFill>
+                  <a:srgbClr val="14161C"/>
+                </a:solidFill>
+                <a:latin typeface="Be Vietnam Pro" pitchFamily="34" charset="0"/>
+                <a:ea typeface="Be Vietnam Pro" pitchFamily="34" charset="-122"/>
+                <a:cs typeface="Be Vietnam Pro" pitchFamily="34" charset="-120"/>
+              </a:rPr>
+              <a:t> version</a:t>
+            </a:r>
+            <a:r>
+              <a:rPr lang="en-US" sz="2700" dirty="0" spc="5" kern="0">
+                <a:solidFill>
+                  <a:srgbClr val="14161C"/>
+                </a:solidFill>
+                <a:latin typeface="Be Vietnam Pro" pitchFamily="34" charset="0"/>
+                <a:ea typeface="Be Vietnam Pro" pitchFamily="34" charset="-122"/>
+                <a:cs typeface="Be Vietnam Pro" pitchFamily="34" charset="-120"/>
+              </a:rPr>
+              <a:t> riêng.</a:t>
             </a:r>
             <a:endParaRPr lang="en-US" sz="2700" dirty="0"/>
           </a:p>

--- a/system-design-101/vi/lessons/sd-13-018/slides/sd-13-018.pptx
+++ b/system-design-101/vi/lessons/sd-13-018/slides/sd-13-018.pptx
@@ -4005,7 +4005,7 @@
               <a:buNone/>
             </a:pPr>
             <a:r>
-              <a:rPr lang="en-US" sz="6300" dirty="0" spc="1" kern="0">
+              <a:rPr lang="en-US" sz="6900" dirty="0" spc="2" kern="0">
                 <a:solidFill>
                   <a:srgbClr val="14161C"/>
                 </a:solidFill>
@@ -4013,10 +4013,10 @@
                 <a:ea typeface="Bricolage Grotesque ExtraBold" pitchFamily="34" charset="-122"/>
                 <a:cs typeface="Bricolage Grotesque ExtraBold" pitchFamily="34" charset="-120"/>
               </a:rPr>
-              <a:t>Plan</a:t>
-            </a:r>
-            <a:r>
-              <a:rPr lang="en-US" sz="6300" dirty="0" spc="-2" kern="0">
+              <a:t>Plan so</a:t>
+            </a:r>
+            <a:r>
+              <a:rPr lang="en-US" sz="6900" dirty="0" spc="1" kern="0">
                 <a:solidFill>
                   <a:srgbClr val="14161C"/>
                 </a:solidFill>
@@ -4024,10 +4024,10 @@
                 <a:ea typeface="Bricolage Grotesque ExtraBold" pitchFamily="34" charset="-122"/>
                 <a:cs typeface="Bricolage Grotesque ExtraBold" pitchFamily="34" charset="-120"/>
               </a:rPr>
-              <a:t> so</a:t>
-            </a:r>
-            <a:r>
-              <a:rPr lang="en-US" sz="6300" dirty="0" spc="0" kern="0">
+              <a:t> sánh</a:t>
+            </a:r>
+            <a:r>
+              <a:rPr lang="en-US" sz="6900" dirty="0" spc="-3" kern="0">
                 <a:solidFill>
                   <a:srgbClr val="14161C"/>
                 </a:solidFill>
@@ -4035,10 +4035,10 @@
                 <a:ea typeface="Bricolage Grotesque ExtraBold" pitchFamily="34" charset="-122"/>
                 <a:cs typeface="Bricolage Grotesque ExtraBold" pitchFamily="34" charset="-120"/>
               </a:rPr>
-              <a:t> sánh</a:t>
-            </a:r>
-            <a:r>
-              <a:rPr lang="en-US" sz="6300" dirty="0" spc="2" kern="0">
+              <a:t> mã,</a:t>
+            </a:r>
+            <a:r>
+              <a:rPr lang="en-US" sz="6900" dirty="0" spc="-24" kern="0">
                 <a:solidFill>
                   <a:srgbClr val="14161C"/>
                 </a:solidFill>
@@ -4046,10 +4046,10 @@
                 <a:ea typeface="Bricolage Grotesque ExtraBold" pitchFamily="34" charset="-122"/>
                 <a:cs typeface="Bricolage Grotesque ExtraBold" pitchFamily="34" charset="-120"/>
               </a:rPr>
-              <a:t> mã,</a:t>
-            </a:r>
-            <a:r>
-              <a:rPr lang="en-US" sz="6300" dirty="0" spc="-22" kern="0">
+              <a:t> state,</a:t>
+            </a:r>
+            <a:r>
+              <a:rPr lang="en-US" sz="6900" dirty="0" spc="3" kern="0">
                 <a:solidFill>
                   <a:srgbClr val="14161C"/>
                 </a:solidFill>
@@ -4057,10 +4057,10 @@
                 <a:ea typeface="Bricolage Grotesque ExtraBold" pitchFamily="34" charset="-122"/>
                 <a:cs typeface="Bricolage Grotesque ExtraBold" pitchFamily="34" charset="-120"/>
               </a:rPr>
-              <a:t> state,</a:t>
-            </a:r>
-            <a:r>
-              <a:rPr lang="en-US" sz="6300" dirty="0" spc="4" kern="0">
+              <a:t> hạ</a:t>
+            </a:r>
+            <a:r>
+              <a:rPr lang="en-US" sz="6900" dirty="0" spc="-4" kern="0">
                 <a:solidFill>
                   <a:srgbClr val="14161C"/>
                 </a:solidFill>
@@ -4068,10 +4068,10 @@
                 <a:ea typeface="Bricolage Grotesque ExtraBold" pitchFamily="34" charset="-122"/>
                 <a:cs typeface="Bricolage Grotesque ExtraBold" pitchFamily="34" charset="-120"/>
               </a:rPr>
-              <a:t> hạ</a:t>
-            </a:r>
-            <a:r>
-              <a:rPr lang="en-US" sz="6300" dirty="0" spc="-3" kern="0">
+              <a:t> tầng</a:t>
+            </a:r>
+            <a:r>
+              <a:rPr lang="en-US" sz="6900" dirty="0" spc="1" kern="0">
                 <a:solidFill>
                   <a:srgbClr val="14161C"/>
                 </a:solidFill>
@@ -4079,20 +4079,9 @@
                 <a:ea typeface="Bricolage Grotesque ExtraBold" pitchFamily="34" charset="-122"/>
                 <a:cs typeface="Bricolage Grotesque ExtraBold" pitchFamily="34" charset="-120"/>
               </a:rPr>
-              <a:t> tầng</a:t>
-            </a:r>
-            <a:r>
-              <a:rPr lang="en-US" sz="6300" dirty="0" spc="3" kern="0">
-                <a:solidFill>
-                  <a:srgbClr val="14161C"/>
-                </a:solidFill>
-                <a:latin typeface="Bricolage Grotesque ExtraBold" pitchFamily="34" charset="0"/>
-                <a:ea typeface="Bricolage Grotesque ExtraBold" pitchFamily="34" charset="-122"/>
-                <a:cs typeface="Bricolage Grotesque ExtraBold" pitchFamily="34" charset="-120"/>
-              </a:rPr>
               <a:t> thật</a:t>
             </a:r>
-            <a:endParaRPr lang="en-US" sz="6300" dirty="0"/>
+            <a:endParaRPr lang="en-US" sz="6900" dirty="0"/>
           </a:p>
         </p:txBody>
       </p:sp>
@@ -10357,7 +10346,7 @@
         <p:spPr>
           <a:xfrm>
             <a:off x="914400" y="1238250"/>
-            <a:ext cx="16459200" cy="952500"/>
+            <a:ext cx="16459200" cy="1143000"/>
           </a:xfrm>
           <a:prstGeom prst="rect">
             <a:avLst/>
@@ -10373,7 +10362,7 @@
               <a:buNone/>
             </a:pPr>
             <a:r>
-              <a:rPr lang="en-US" sz="4650" dirty="0" spc="0" kern="0">
+              <a:rPr lang="en-US" sz="6900" dirty="0" spc="2" kern="0">
                 <a:solidFill>
                   <a:srgbClr val="F3EEE3"/>
                 </a:solidFill>
@@ -10384,7 +10373,7 @@
               <a:t>Plan</a:t>
             </a:r>
             <a:r>
-              <a:rPr lang="en-US" sz="4650" dirty="0" spc="9" kern="0">
+              <a:rPr lang="en-US" sz="6900" dirty="0" spc="13" kern="0">
                 <a:solidFill>
                   <a:srgbClr val="F3EEE3"/>
                 </a:solidFill>
@@ -10395,7 +10384,7 @@
               <a:t> đòi</a:t>
             </a:r>
             <a:r>
-              <a:rPr lang="en-US" sz="4650" dirty="0" spc="-38" kern="0">
+              <a:rPr lang="en-US" sz="6900" dirty="0" spc="-58" kern="0">
                 <a:solidFill>
                   <a:srgbClr val="F3EEE3"/>
                 </a:solidFill>
@@ -10406,7 +10395,7 @@
               <a:t> sửa</a:t>
             </a:r>
             <a:r>
-              <a:rPr lang="en-US" sz="4650" dirty="0" spc="-3" kern="0">
+              <a:rPr lang="en-US" sz="6900" dirty="0" spc="-1" kern="0">
                 <a:solidFill>
                   <a:srgbClr val="F3EEE3"/>
                 </a:solidFill>
@@ -10417,7 +10406,7 @@
               <a:t> máy</a:t>
             </a:r>
             <a:r>
-              <a:rPr lang="en-US" sz="4650" dirty="0" spc="-2" kern="0">
+              <a:rPr lang="en-US" sz="6900" dirty="0" spc="-20" kern="0">
                 <a:solidFill>
                   <a:srgbClr val="F3EEE3"/>
                 </a:solidFill>
@@ -10425,10 +10414,10 @@
                 <a:ea typeface="Bricolage Grotesque ExtraBold" pitchFamily="34" charset="-122"/>
                 <a:cs typeface="Bricolage Grotesque ExtraBold" pitchFamily="34" charset="-120"/>
               </a:rPr>
-              <a:t> ảo</a:t>
-            </a:r>
-            <a:r>
-              <a:rPr lang="en-US" sz="4650" dirty="0" spc="-49" kern="0">
+              <a:t> ảo.</a:t>
+            </a:r>
+            <a:r>
+              <a:rPr lang="en-US" sz="6900" dirty="0" spc="0" kern="0">
                 <a:solidFill>
                   <a:srgbClr val="F3EEE3"/>
                 </a:solidFill>
@@ -10436,10 +10425,10 @@
                 <a:ea typeface="Bricolage Grotesque ExtraBold" pitchFamily="34" charset="-122"/>
                 <a:cs typeface="Bricolage Grotesque ExtraBold" pitchFamily="34" charset="-120"/>
               </a:rPr>
-              <a:t> về</a:t>
-            </a:r>
-            <a:r>
-              <a:rPr lang="en-US" sz="4650" dirty="0" spc="0" kern="0">
+              <a:t> Apply</a:t>
+            </a:r>
+            <a:r>
+              <a:rPr lang="en-US" sz="6900" dirty="0" spc="-12" kern="0">
                 <a:solidFill>
                   <a:srgbClr val="F3EEE3"/>
                 </a:solidFill>
@@ -10447,53 +10436,9 @@
                 <a:ea typeface="Bricolage Grotesque ExtraBold" pitchFamily="34" charset="-122"/>
                 <a:cs typeface="Bricolage Grotesque ExtraBold" pitchFamily="34" charset="-120"/>
               </a:rPr>
-              <a:t> giá</a:t>
-            </a:r>
-            <a:r>
-              <a:rPr lang="en-US" sz="4650" dirty="0" spc="-3" kern="0">
-                <a:solidFill>
-                  <a:srgbClr val="F3EEE3"/>
-                </a:solidFill>
-                <a:latin typeface="Bricolage Grotesque ExtraBold" pitchFamily="34" charset="0"/>
-                <a:ea typeface="Bricolage Grotesque ExtraBold" pitchFamily="34" charset="-122"/>
-                <a:cs typeface="Bricolage Grotesque ExtraBold" pitchFamily="34" charset="-120"/>
-              </a:rPr>
-              <a:t> trị</a:t>
-            </a:r>
-            <a:r>
-              <a:rPr lang="en-US" sz="4650" dirty="0" spc="-6" kern="0">
-                <a:solidFill>
-                  <a:srgbClr val="F3EEE3"/>
-                </a:solidFill>
-                <a:latin typeface="Bricolage Grotesque ExtraBold" pitchFamily="34" charset="0"/>
-                <a:ea typeface="Bricolage Grotesque ExtraBold" pitchFamily="34" charset="-122"/>
-                <a:cs typeface="Bricolage Grotesque ExtraBold" pitchFamily="34" charset="-120"/>
-              </a:rPr>
-              <a:t> cũ.</a:t>
-            </a:r>
-            <a:r>
-              <a:rPr lang="en-US" sz="4650" dirty="0" spc="-2" kern="0">
-                <a:solidFill>
-                  <a:srgbClr val="F3EEE3"/>
-                </a:solidFill>
-                <a:latin typeface="Bricolage Grotesque ExtraBold" pitchFamily="34" charset="0"/>
-                <a:ea typeface="Bricolage Grotesque ExtraBold" pitchFamily="34" charset="-122"/>
-                <a:cs typeface="Bricolage Grotesque ExtraBold" pitchFamily="34" charset="-120"/>
-              </a:rPr>
-              <a:t> Apply</a:t>
-            </a:r>
-            <a:r>
-              <a:rPr lang="en-US" sz="4650" dirty="0" spc="-8" kern="0">
-                <a:solidFill>
-                  <a:srgbClr val="F3EEE3"/>
-                </a:solidFill>
-                <a:latin typeface="Bricolage Grotesque ExtraBold" pitchFamily="34" charset="0"/>
-                <a:ea typeface="Bricolage Grotesque ExtraBold" pitchFamily="34" charset="-122"/>
-                <a:cs typeface="Bricolage Grotesque ExtraBold" pitchFamily="34" charset="-120"/>
-              </a:rPr>
               <a:t> ngay?</a:t>
             </a:r>
-            <a:endParaRPr lang="en-US" sz="4650" dirty="0"/>
+            <a:endParaRPr lang="en-US" sz="6900" dirty="0"/>
           </a:p>
         </p:txBody>
       </p:sp>
@@ -10505,7 +10450,7 @@
         </p:nvSpPr>
         <p:spPr>
           <a:xfrm>
-            <a:off x="914400" y="2286000"/>
+            <a:off x="914400" y="2571750"/>
             <a:ext cx="16459200" cy="533400"/>
           </a:xfrm>
           <a:prstGeom prst="rect">
@@ -11429,7 +11374,7 @@
               <a:buNone/>
             </a:pPr>
             <a:r>
-              <a:rPr lang="en-US" sz="6600" dirty="0" spc="-1" kern="0">
+              <a:rPr lang="en-US" sz="6900" dirty="0" spc="1" kern="0">
                 <a:solidFill>
                   <a:srgbClr val="14161C"/>
                 </a:solidFill>
@@ -11440,7 +11385,7 @@
               <a:t>Sáu</a:t>
             </a:r>
             <a:r>
-              <a:rPr lang="en-US" sz="6600" dirty="0" spc="23" kern="0">
+              <a:rPr lang="en-US" sz="6900" dirty="0" spc="28" kern="0">
                 <a:solidFill>
                   <a:srgbClr val="14161C"/>
                 </a:solidFill>
@@ -11451,7 +11396,7 @@
               <a:t> điều</a:t>
             </a:r>
             <a:r>
-              <a:rPr lang="en-US" sz="6600" dirty="0" spc="-2" kern="0">
+              <a:rPr lang="en-US" sz="6900" dirty="0" spc="-2" kern="0">
                 <a:solidFill>
                   <a:srgbClr val="14161C"/>
                 </a:solidFill>
@@ -11462,7 +11407,7 @@
               <a:t> cần</a:t>
             </a:r>
             <a:r>
-              <a:rPr lang="en-US" sz="6600" dirty="0" spc="-1" kern="0">
+              <a:rPr lang="en-US" sz="6900" dirty="0" spc="1" kern="0">
                 <a:solidFill>
                   <a:srgbClr val="14161C"/>
                 </a:solidFill>
@@ -11472,7 +11417,7 @@
               </a:rPr>
               <a:t> nhớ</a:t>
             </a:r>
-            <a:endParaRPr lang="en-US" sz="6600" dirty="0"/>
+            <a:endParaRPr lang="en-US" sz="6900" dirty="0"/>
           </a:p>
         </p:txBody>
       </p:sp>

--- a/system-design-101/vi/lessons/sd-13-018/slides/sd-13-018.pptx
+++ b/system-design-101/vi/lessons/sd-13-018/slides/sd-13-018.pptx
@@ -4326,7 +4326,7 @@
               <a:buNone/>
             </a:pPr>
             <a:r>
-              <a:rPr lang="en-US" sz="3300" dirty="0" spc="-10" kern="0">
+              <a:rPr lang="en-US" sz="3300" dirty="0" spc="-16" kern="0">
                 <a:solidFill>
                   <a:srgbClr val="E8472B"/>
                 </a:solidFill>
@@ -4334,10 +4334,10 @@
                 <a:ea typeface="Be Vietnam Pro ExtraBold" pitchFamily="34" charset="-122"/>
                 <a:cs typeface="Be Vietnam Pro ExtraBold" pitchFamily="34" charset="-120"/>
               </a:rPr>
-              <a:t>Mỗi</a:t>
-            </a:r>
-            <a:r>
-              <a:rPr lang="en-US" sz="3300" dirty="0" spc="-13" kern="0">
+              <a:t>Thay</a:t>
+            </a:r>
+            <a:r>
+              <a:rPr lang="en-US" sz="3300" dirty="0" spc="1" kern="0">
                 <a:solidFill>
                   <a:srgbClr val="E8472B"/>
                 </a:solidFill>
@@ -4345,10 +4345,10 @@
                 <a:ea typeface="Be Vietnam Pro ExtraBold" pitchFamily="34" charset="-122"/>
                 <a:cs typeface="Be Vietnam Pro ExtraBold" pitchFamily="34" charset="-120"/>
               </a:rPr>
-              <a:t> thay</a:t>
-            </a:r>
-            <a:r>
-              <a:rPr lang="en-US" sz="3300" dirty="0" spc="1" kern="0">
+              <a:t> đổi</a:t>
+            </a:r>
+            <a:r>
+              <a:rPr lang="en-US" sz="3300" dirty="0" spc="-7" kern="0">
                 <a:solidFill>
                   <a:srgbClr val="E8472B"/>
                 </a:solidFill>
@@ -4356,10 +4356,10 @@
                 <a:ea typeface="Be Vietnam Pro ExtraBold" pitchFamily="34" charset="-122"/>
                 <a:cs typeface="Be Vietnam Pro ExtraBold" pitchFamily="34" charset="-120"/>
               </a:rPr>
-              <a:t> đổi</a:t>
-            </a:r>
-            <a:r>
-              <a:rPr lang="en-US" sz="3300" dirty="0" spc="-8" kern="0">
+              <a:t> bất</a:t>
+            </a:r>
+            <a:r>
+              <a:rPr lang="en-US" sz="3300" dirty="0" spc="-11" kern="0">
                 <a:solidFill>
                   <a:srgbClr val="E8472B"/>
                 </a:solidFill>
@@ -4367,10 +4367,10 @@
                 <a:ea typeface="Be Vietnam Pro ExtraBold" pitchFamily="34" charset="-122"/>
                 <a:cs typeface="Be Vietnam Pro ExtraBold" pitchFamily="34" charset="-120"/>
               </a:rPr>
-              <a:t> bất</a:t>
-            </a:r>
-            <a:r>
-              <a:rPr lang="en-US" sz="3300" dirty="0" spc="-10" kern="0">
+              <a:t> ngờ</a:t>
+            </a:r>
+            <a:r>
+              <a:rPr lang="en-US" sz="3300" dirty="0" spc="2" kern="0">
                 <a:solidFill>
                   <a:srgbClr val="E8472B"/>
                 </a:solidFill>
@@ -4378,10 +4378,10 @@
                 <a:ea typeface="Be Vietnam Pro ExtraBold" pitchFamily="34" charset="-122"/>
                 <a:cs typeface="Be Vietnam Pro ExtraBold" pitchFamily="34" charset="-120"/>
               </a:rPr>
-              <a:t> ngờ</a:t>
-            </a:r>
-            <a:r>
-              <a:rPr lang="en-US" sz="3300" dirty="0" spc="2" kern="0">
+              <a:t> đều</a:t>
+            </a:r>
+            <a:r>
+              <a:rPr lang="en-US" sz="3300" dirty="0" spc="-3" kern="0">
                 <a:solidFill>
                   <a:srgbClr val="E8472B"/>
                 </a:solidFill>
@@ -4389,10 +4389,10 @@
                 <a:ea typeface="Be Vietnam Pro ExtraBold" pitchFamily="34" charset="-122"/>
                 <a:cs typeface="Be Vietnam Pro ExtraBold" pitchFamily="34" charset="-120"/>
               </a:rPr>
-              <a:t> đều</a:t>
-            </a:r>
-            <a:r>
-              <a:rPr lang="en-US" sz="3300" dirty="0" spc="-3" kern="0">
+              <a:t> lần</a:t>
+            </a:r>
+            <a:r>
+              <a:rPr lang="en-US" sz="3300" dirty="0" spc="-30" kern="0">
                 <a:solidFill>
                   <a:srgbClr val="E8472B"/>
                 </a:solidFill>
@@ -4400,32 +4400,10 @@
                 <a:ea typeface="Be Vietnam Pro ExtraBold" pitchFamily="34" charset="-122"/>
                 <a:cs typeface="Be Vietnam Pro ExtraBold" pitchFamily="34" charset="-120"/>
               </a:rPr>
-              <a:t> lần</a:t>
-            </a:r>
-            <a:r>
-              <a:rPr lang="en-US" sz="3300" dirty="0" spc="13" kern="0">
-                <a:solidFill>
-                  <a:srgbClr val="E8472B"/>
-                </a:solidFill>
-                <a:latin typeface="Be Vietnam Pro ExtraBold" pitchFamily="34" charset="0"/>
-                <a:ea typeface="Be Vietnam Pro ExtraBold" pitchFamily="34" charset="-122"/>
-                <a:cs typeface="Be Vietnam Pro ExtraBold" pitchFamily="34" charset="-120"/>
-              </a:rPr>
-              <a:t> được</a:t>
-            </a:r>
-            <a:r>
-              <a:rPr lang="en-US" sz="3300" dirty="0" spc="-31" kern="0">
-                <a:solidFill>
-                  <a:srgbClr val="E8472B"/>
-                </a:solidFill>
-                <a:latin typeface="Be Vietnam Pro ExtraBold" pitchFamily="34" charset="0"/>
-                <a:ea typeface="Be Vietnam Pro ExtraBold" pitchFamily="34" charset="-122"/>
-                <a:cs typeface="Be Vietnam Pro ExtraBold" pitchFamily="34" charset="-120"/>
-              </a:rPr>
               <a:t> về</a:t>
             </a:r>
             <a:r>
-              <a:rPr lang="en-US" sz="3300" dirty="0" spc="-14" kern="0">
+              <a:rPr lang="en-US" sz="3300" dirty="0" spc="-15" kern="0">
                 <a:solidFill>
                   <a:srgbClr val="E8472B"/>
                 </a:solidFill>
@@ -4538,21 +4516,10 @@
                 <a:ea typeface="Be Vietnam Pro" pitchFamily="34" charset="-122"/>
                 <a:cs typeface="Be Vietnam Pro" pitchFamily="34" charset="-120"/>
               </a:rPr>
-              <a:t> lập, mỗi</a:t>
-            </a:r>
-            <a:r>
-              <a:rPr lang="en-US" sz="2550" dirty="0" spc="1" kern="0">
-                <a:solidFill>
-                  <a:srgbClr val="14161C"/>
-                </a:solidFill>
-                <a:latin typeface="Be Vietnam Pro" pitchFamily="34" charset="0"/>
-                <a:ea typeface="Be Vietnam Pro" pitchFamily="34" charset="-122"/>
-                <a:cs typeface="Be Vietnam Pro" pitchFamily="34" charset="-120"/>
-              </a:rPr>
-              <a:t> nguồn</a:t>
-            </a:r>
-            <a:r>
-              <a:rPr lang="en-US" sz="2550" dirty="0" spc="-28" kern="0">
+              <a:t> lập,</a:t>
+            </a:r>
+            <a:r>
+              <a:rPr lang="en-US" sz="2550" dirty="0" spc="-27" kern="0">
                 <a:solidFill>
                   <a:srgbClr val="14161C"/>
                 </a:solidFill>
@@ -4563,7 +4530,7 @@
               <a:t> kèm</a:t>
             </a:r>
             <a:r>
-              <a:rPr lang="en-US" sz="2550" dirty="0" spc="1" kern="0">
+              <a:rPr lang="en-US" sz="2550" dirty="0" spc="0" kern="0">
                 <a:solidFill>
                   <a:srgbClr val="14161C"/>
                 </a:solidFill>
@@ -4574,7 +4541,7 @@
               <a:t> cách</a:t>
             </a:r>
             <a:r>
-              <a:rPr lang="en-US" sz="2550" dirty="0" spc="-19" kern="0">
+              <a:rPr lang="en-US" sz="2550" dirty="0" spc="-18" kern="0">
                 <a:solidFill>
                   <a:srgbClr val="14161C"/>
                 </a:solidFill>
@@ -4585,26 +4552,15 @@
               <a:t> xác</a:t>
             </a:r>
             <a:r>
-              <a:rPr lang="en-US" sz="2550" dirty="0" spc="0" kern="0">
-                <a:solidFill>
-                  <a:srgbClr val="14161C"/>
-                </a:solidFill>
-                <a:latin typeface="Be Vietnam Pro" pitchFamily="34" charset="0"/>
-                <a:ea typeface="Be Vietnam Pro" pitchFamily="34" charset="-122"/>
-                <a:cs typeface="Be Vietnam Pro" pitchFamily="34" charset="-120"/>
-              </a:rPr>
-              <a:t> nhận</a:t>
-            </a:r>
-            <a:r>
-              <a:rPr lang="en-US" sz="2550" dirty="0" spc="-3" kern="0">
-                <a:solidFill>
-                  <a:srgbClr val="14161C"/>
-                </a:solidFill>
-                <a:latin typeface="Be Vietnam Pro" pitchFamily="34" charset="0"/>
-                <a:ea typeface="Be Vietnam Pro" pitchFamily="34" charset="-122"/>
-                <a:cs typeface="Be Vietnam Pro" pitchFamily="34" charset="-120"/>
-              </a:rPr>
-              <a:t> hoặc</a:t>
+              <a:rPr lang="en-US" sz="2550" dirty="0" spc="-1" kern="0">
+                <a:solidFill>
+                  <a:srgbClr val="14161C"/>
+                </a:solidFill>
+                <a:latin typeface="Be Vietnam Pro" pitchFamily="34" charset="0"/>
+                <a:ea typeface="Be Vietnam Pro" pitchFamily="34" charset="-122"/>
+                <a:cs typeface="Be Vietnam Pro" pitchFamily="34" charset="-120"/>
+              </a:rPr>
+              <a:t> nhận,</a:t>
             </a:r>
             <a:r>
               <a:rPr lang="en-US" sz="2550" dirty="0" spc="-7" kern="0">
@@ -7548,7 +7504,7 @@
               <a:t>Đưa</a:t>
             </a:r>
             <a:r>
-              <a:rPr lang="en-US" sz="3150" dirty="0" spc="3" kern="0">
+              <a:rPr lang="en-US" sz="3150" dirty="0" spc="-4" kern="0">
                 <a:solidFill>
                   <a:srgbClr val="14161C"/>
                 </a:solidFill>
@@ -7556,10 +7512,10 @@
                 <a:ea typeface="Be Vietnam Pro SemiBold" pitchFamily="34" charset="-122"/>
                 <a:cs typeface="Be Vietnam Pro SemiBold" pitchFamily="34" charset="-120"/>
               </a:rPr>
-              <a:t> các</a:t>
-            </a:r>
-            <a:r>
-              <a:rPr lang="en-US" sz="3150" dirty="0" spc="-4" kern="0">
+              <a:t> phần</a:t>
+            </a:r>
+            <a:r>
+              <a:rPr lang="en-US" sz="3150" dirty="0" spc="1" kern="0">
                 <a:solidFill>
                   <a:srgbClr val="14161C"/>
                 </a:solidFill>
@@ -7567,10 +7523,10 @@
                 <a:ea typeface="Be Vietnam Pro SemiBold" pitchFamily="34" charset="-122"/>
                 <a:cs typeface="Be Vietnam Pro SemiBold" pitchFamily="34" charset="-120"/>
               </a:rPr>
-              <a:t> phần</a:t>
-            </a:r>
-            <a:r>
-              <a:rPr lang="en-US" sz="3150" dirty="0" spc="0" kern="0">
+              <a:t> tử</a:t>
+            </a:r>
+            <a:r>
+              <a:rPr lang="en-US" sz="3150" dirty="0" spc="-19" kern="0">
                 <a:solidFill>
                   <a:srgbClr val="14161C"/>
                 </a:solidFill>
@@ -7578,10 +7534,10 @@
                 <a:ea typeface="Be Vietnam Pro SemiBold" pitchFamily="34" charset="-122"/>
                 <a:cs typeface="Be Vietnam Pro SemiBold" pitchFamily="34" charset="-120"/>
               </a:rPr>
-              <a:t> tử</a:t>
-            </a:r>
-            <a:r>
-              <a:rPr lang="en-US" sz="3150" dirty="0" spc="-19" kern="0">
+              <a:t> trong</a:t>
+            </a:r>
+            <a:r>
+              <a:rPr lang="en-US" sz="3150" dirty="0" spc="-5" kern="0">
                 <a:solidFill>
                   <a:srgbClr val="14161C"/>
                 </a:solidFill>
@@ -7589,10 +7545,10 @@
                 <a:ea typeface="Be Vietnam Pro SemiBold" pitchFamily="34" charset="-122"/>
                 <a:cs typeface="Be Vietnam Pro SemiBold" pitchFamily="34" charset="-120"/>
               </a:rPr>
-              <a:t> trong</a:t>
-            </a:r>
-            <a:r>
-              <a:rPr lang="en-US" sz="3150" dirty="0" spc="-5" kern="0">
+              <a:t> mã</a:t>
+            </a:r>
+            <a:r>
+              <a:rPr lang="en-US" sz="3150" dirty="0" spc="-25" kern="0">
                 <a:solidFill>
                   <a:srgbClr val="14161C"/>
                 </a:solidFill>
@@ -7600,10 +7556,10 @@
                 <a:ea typeface="Be Vietnam Pro SemiBold" pitchFamily="34" charset="-122"/>
                 <a:cs typeface="Be Vietnam Pro SemiBold" pitchFamily="34" charset="-120"/>
               </a:rPr>
-              <a:t> mã</a:t>
-            </a:r>
-            <a:r>
-              <a:rPr lang="en-US" sz="3150" dirty="0" spc="-25" kern="0">
+              <a:t> về</a:t>
+            </a:r>
+            <a:r>
+              <a:rPr lang="en-US" sz="3150" dirty="0" spc="-6" kern="0">
                 <a:solidFill>
                   <a:srgbClr val="14161C"/>
                 </a:solidFill>
@@ -7611,10 +7567,10 @@
                 <a:ea typeface="Be Vietnam Pro SemiBold" pitchFamily="34" charset="-122"/>
                 <a:cs typeface="Be Vietnam Pro SemiBold" pitchFamily="34" charset="-120"/>
               </a:rPr>
-              <a:t> về</a:t>
-            </a:r>
-            <a:r>
-              <a:rPr lang="en-US" sz="3150" dirty="0" spc="-6" kern="0">
+              <a:t> đúng</a:t>
+            </a:r>
+            <a:r>
+              <a:rPr lang="en-US" sz="3150" dirty="0" spc="1" kern="0">
                 <a:solidFill>
                   <a:srgbClr val="14161C"/>
                 </a:solidFill>
@@ -7622,10 +7578,10 @@
                 <a:ea typeface="Be Vietnam Pro SemiBold" pitchFamily="34" charset="-122"/>
                 <a:cs typeface="Be Vietnam Pro SemiBold" pitchFamily="34" charset="-120"/>
               </a:rPr>
-              <a:t> đúng</a:t>
-            </a:r>
-            <a:r>
-              <a:rPr lang="en-US" sz="3150" dirty="0" spc="1" kern="0">
+              <a:t> thứ</a:t>
+            </a:r>
+            <a:r>
+              <a:rPr lang="en-US" sz="3150" dirty="0" spc="0" kern="0">
                 <a:solidFill>
                   <a:srgbClr val="14161C"/>
                 </a:solidFill>
@@ -7633,21 +7589,10 @@
                 <a:ea typeface="Be Vietnam Pro SemiBold" pitchFamily="34" charset="-122"/>
                 <a:cs typeface="Be Vietnam Pro SemiBold" pitchFamily="34" charset="-120"/>
               </a:rPr>
-              <a:t> thứ</a:t>
-            </a:r>
-            <a:r>
-              <a:rPr lang="en-US" sz="3150" dirty="0" spc="0" kern="0">
-                <a:solidFill>
-                  <a:srgbClr val="14161C"/>
-                </a:solidFill>
-                <a:latin typeface="Be Vietnam Pro SemiBold" pitchFamily="34" charset="0"/>
-                <a:ea typeface="Be Vietnam Pro SemiBold" pitchFamily="34" charset="-122"/>
-                <a:cs typeface="Be Vietnam Pro SemiBold" pitchFamily="34" charset="-120"/>
-              </a:rPr>
               <a:t> tự</a:t>
             </a:r>
             <a:r>
-              <a:rPr lang="en-US" sz="3150" dirty="0" spc="11" kern="0">
+              <a:rPr lang="en-US" sz="3150" dirty="0" spc="10" kern="0">
                 <a:solidFill>
                   <a:srgbClr val="14161C"/>
                 </a:solidFill>
@@ -9619,7 +9564,7 @@
               <a:buNone/>
             </a:pPr>
             <a:r>
-              <a:rPr lang="en-US" sz="2850" dirty="0" spc="-22" kern="0">
+              <a:rPr lang="en-US" sz="2850" dirty="0" spc="-19" kern="0">
                 <a:solidFill>
                   <a:srgbClr val="14161C"/>
                 </a:solidFill>
@@ -9627,10 +9572,10 @@
                 <a:ea typeface="Be Vietnam Pro SemiBold" pitchFamily="34" charset="-122"/>
                 <a:cs typeface="Be Vietnam Pro SemiBold" pitchFamily="34" charset="-120"/>
               </a:rPr>
-              <a:t>State</a:t>
-            </a:r>
-            <a:r>
-              <a:rPr lang="en-US" sz="2850" dirty="0" spc="-19" kern="0">
+              <a:t>State,</a:t>
+            </a:r>
+            <a:r>
+              <a:rPr lang="en-US" sz="2850" dirty="0" spc="-10" kern="0">
                 <a:solidFill>
                   <a:srgbClr val="14161C"/>
                 </a:solidFill>
@@ -9638,10 +9583,10 @@
                 <a:ea typeface="Be Vietnam Pro SemiBold" pitchFamily="34" charset="-122"/>
                 <a:cs typeface="Be Vietnam Pro SemiBold" pitchFamily="34" charset="-120"/>
               </a:rPr>
-              <a:t> và</a:t>
-            </a:r>
-            <a:r>
-              <a:rPr lang="en-US" sz="2850" dirty="0" spc="-9" kern="0">
+              <a:t> tệp</a:t>
+            </a:r>
+            <a:r>
+              <a:rPr lang="en-US" sz="2850" dirty="0" spc="-4" kern="0">
                 <a:solidFill>
                   <a:srgbClr val="14161C"/>
                 </a:solidFill>
@@ -9649,10 +9594,10 @@
                 <a:ea typeface="Be Vietnam Pro SemiBold" pitchFamily="34" charset="-122"/>
                 <a:cs typeface="Be Vietnam Pro SemiBold" pitchFamily="34" charset="-120"/>
               </a:rPr>
-              <a:t> tệp</a:t>
-            </a:r>
-            <a:r>
-              <a:rPr lang="en-US" sz="2850" dirty="0" spc="-4" kern="0">
+              <a:t> plan</a:t>
+            </a:r>
+            <a:r>
+              <a:rPr lang="en-US" sz="2850" dirty="0" spc="-2" kern="0">
                 <a:solidFill>
                   <a:srgbClr val="14161C"/>
                 </a:solidFill>
@@ -9660,7 +9605,7 @@
                 <a:ea typeface="Be Vietnam Pro SemiBold" pitchFamily="34" charset="-122"/>
                 <a:cs typeface="Be Vietnam Pro SemiBold" pitchFamily="34" charset="-120"/>
               </a:rPr>
-              <a:t> plan</a:t>
+              <a:t> có thể</a:t>
             </a:r>
             <a:r>
               <a:rPr lang="en-US" sz="2850" dirty="0" spc="-3" kern="0">
@@ -9671,10 +9616,10 @@
                 <a:ea typeface="Be Vietnam Pro SemiBold" pitchFamily="34" charset="-122"/>
                 <a:cs typeface="Be Vietnam Pro SemiBold" pitchFamily="34" charset="-120"/>
               </a:rPr>
-              <a:t> có</a:t>
-            </a:r>
-            <a:r>
-              <a:rPr lang="en-US" sz="2850" dirty="0" spc="-2" kern="0">
+              <a:t> lộ</a:t>
+            </a:r>
+            <a:r>
+              <a:rPr lang="en-US" sz="2850" dirty="0" spc="3" kern="0">
                 <a:solidFill>
                   <a:srgbClr val="14161C"/>
                 </a:solidFill>
@@ -9682,10 +9627,10 @@
                 <a:ea typeface="Be Vietnam Pro SemiBold" pitchFamily="34" charset="-122"/>
                 <a:cs typeface="Be Vietnam Pro SemiBold" pitchFamily="34" charset="-120"/>
               </a:rPr>
-              <a:t> thể</a:t>
-            </a:r>
-            <a:r>
-              <a:rPr lang="en-US" sz="2850" dirty="0" spc="12" kern="0">
+              <a:t> dữ liệu</a:t>
+            </a:r>
+            <a:r>
+              <a:rPr lang="en-US" sz="2850" dirty="0" spc="-9" kern="0">
                 <a:solidFill>
                   <a:srgbClr val="14161C"/>
                 </a:solidFill>
@@ -9693,32 +9638,10 @@
                 <a:ea typeface="Be Vietnam Pro SemiBold" pitchFamily="34" charset="-122"/>
                 <a:cs typeface="Be Vietnam Pro SemiBold" pitchFamily="34" charset="-120"/>
               </a:rPr>
-              <a:t> chứa</a:t>
-            </a:r>
-            <a:r>
-              <a:rPr lang="en-US" sz="2850" dirty="0" spc="3" kern="0">
-                <a:solidFill>
-                  <a:srgbClr val="14161C"/>
-                </a:solidFill>
-                <a:latin typeface="Be Vietnam Pro SemiBold" pitchFamily="34" charset="0"/>
-                <a:ea typeface="Be Vietnam Pro SemiBold" pitchFamily="34" charset="-122"/>
-                <a:cs typeface="Be Vietnam Pro SemiBold" pitchFamily="34" charset="-120"/>
-              </a:rPr>
-              <a:t> dữ liệu</a:t>
-            </a:r>
-            <a:r>
-              <a:rPr lang="en-US" sz="2850" dirty="0" spc="-9" kern="0">
-                <a:solidFill>
-                  <a:srgbClr val="14161C"/>
-                </a:solidFill>
-                <a:latin typeface="Be Vietnam Pro SemiBold" pitchFamily="34" charset="0"/>
-                <a:ea typeface="Be Vietnam Pro SemiBold" pitchFamily="34" charset="-122"/>
-                <a:cs typeface="Be Vietnam Pro SemiBold" pitchFamily="34" charset="-120"/>
-              </a:rPr>
               <a:t> nhạy</a:t>
             </a:r>
             <a:r>
-              <a:rPr lang="en-US" sz="2850" dirty="0" spc="2" kern="0">
+              <a:rPr lang="en-US" sz="2850" dirty="0" spc="1" kern="0">
                 <a:solidFill>
                   <a:srgbClr val="14161C"/>
                 </a:solidFill>
@@ -10555,7 +10478,7 @@
               <a:t> trên</a:t>
             </a:r>
             <a:r>
-              <a:rPr lang="en-US" sz="2700" dirty="0" spc="-3" kern="0">
+              <a:rPr lang="en-US" sz="2700" dirty="0" spc="-5" kern="0">
                 <a:solidFill>
                   <a:srgbClr val="E4E1D8"/>
                 </a:solidFill>
@@ -10563,7 +10486,7 @@
                 <a:ea typeface="Be Vietnam Pro" pitchFamily="34" charset="-122"/>
                 <a:cs typeface="Be Vietnam Pro" pitchFamily="34" charset="-120"/>
               </a:rPr>
-              <a:t> giao diện</a:t>
+              <a:t> console</a:t>
             </a:r>
             <a:r>
               <a:rPr lang="en-US" sz="2700" dirty="0" spc="0" kern="0">
@@ -11877,29 +11800,7 @@
               <a:t> -/+</a:t>
             </a:r>
             <a:r>
-              <a:rPr lang="en-US" sz="2250" dirty="0" spc="-20" kern="0">
-                <a:solidFill>
-                  <a:srgbClr val="14161C"/>
-                </a:solidFill>
-                <a:latin typeface="Be Vietnam Pro" pitchFamily="34" charset="0"/>
-                <a:ea typeface="Be Vietnam Pro" pitchFamily="34" charset="-122"/>
-                <a:cs typeface="Be Vietnam Pro" pitchFamily="34" charset="-120"/>
-              </a:rPr>
-              <a:t> xóa</a:t>
-            </a:r>
-            <a:r>
-              <a:rPr lang="en-US" sz="2250" dirty="0" spc="-23" kern="0">
-                <a:solidFill>
-                  <a:srgbClr val="14161C"/>
-                </a:solidFill>
-                <a:latin typeface="Be Vietnam Pro" pitchFamily="34" charset="0"/>
-                <a:ea typeface="Be Vietnam Pro" pitchFamily="34" charset="-122"/>
-                <a:cs typeface="Be Vietnam Pro" pitchFamily="34" charset="-120"/>
-              </a:rPr>
-              <a:t> rồi</a:t>
-            </a:r>
-            <a:r>
-              <a:rPr lang="en-US" sz="2250" dirty="0" spc="-12" kern="0">
+              <a:rPr lang="en-US" sz="2250" dirty="0" spc="-13" kern="0">
                 <a:solidFill>
                   <a:srgbClr val="14161C"/>
                 </a:solidFill>
@@ -11910,7 +11811,7 @@
               <a:t> tạo</a:t>
             </a:r>
             <a:r>
-              <a:rPr lang="en-US" sz="2250" dirty="0" spc="-1" kern="0">
+              <a:rPr lang="en-US" sz="2250" dirty="0" spc="0" kern="0">
                 <a:solidFill>
                   <a:srgbClr val="14161C"/>
                 </a:solidFill>
@@ -12043,26 +11944,26 @@
               <a:t> state</a:t>
             </a:r>
             <a:r>
-              <a:rPr lang="en-US" sz="2250" dirty="0" spc="-17" kern="0">
-                <a:solidFill>
-                  <a:srgbClr val="14161C"/>
-                </a:solidFill>
-                <a:latin typeface="Be Vietnam Pro" pitchFamily="34" charset="0"/>
-                <a:ea typeface="Be Vietnam Pro" pitchFamily="34" charset="-122"/>
-                <a:cs typeface="Be Vietnam Pro" pitchFamily="34" charset="-120"/>
-              </a:rPr>
-              <a:t> trong</a:t>
-            </a:r>
-            <a:r>
-              <a:rPr lang="en-US" sz="2250" dirty="0" spc="2" kern="0">
-                <a:solidFill>
-                  <a:srgbClr val="14161C"/>
-                </a:solidFill>
-                <a:latin typeface="Be Vietnam Pro" pitchFamily="34" charset="0"/>
-                <a:ea typeface="Be Vietnam Pro" pitchFamily="34" charset="-122"/>
-                <a:cs typeface="Be Vietnam Pro" pitchFamily="34" charset="-120"/>
-              </a:rPr>
-              <a:t> bộ</a:t>
+              <a:rPr lang="en-US" sz="2250" dirty="0" spc="-13" kern="0">
+                <a:solidFill>
+                  <a:srgbClr val="14161C"/>
+                </a:solidFill>
+                <a:latin typeface="Be Vietnam Pro" pitchFamily="34" charset="0"/>
+                <a:ea typeface="Be Vietnam Pro" pitchFamily="34" charset="-122"/>
+                <a:cs typeface="Be Vietnam Pro" pitchFamily="34" charset="-120"/>
+              </a:rPr>
+              <a:t> tạm</a:t>
+            </a:r>
+            <a:r>
+              <a:rPr lang="en-US" sz="2250" dirty="0" spc="0" kern="0">
+                <a:solidFill>
+                  <a:srgbClr val="14161C"/>
+                </a:solidFill>
+                <a:latin typeface="Be Vietnam Pro" pitchFamily="34" charset="0"/>
+                <a:ea typeface="Be Vietnam Pro" pitchFamily="34" charset="-122"/>
+                <a:cs typeface="Be Vietnam Pro" pitchFamily="34" charset="-120"/>
+              </a:rPr>
+              <a:t> thời;</a:t>
             </a:r>
             <a:r>
               <a:rPr lang="en-US" sz="2250" dirty="0" spc="1" kern="0">
@@ -12073,7 +11974,7 @@
                 <a:ea typeface="Be Vietnam Pro" pitchFamily="34" charset="-122"/>
                 <a:cs typeface="Be Vietnam Pro" pitchFamily="34" charset="-120"/>
               </a:rPr>
-              <a:t> nhớ; apply</a:t>
+              <a:t> apply</a:t>
             </a:r>
             <a:r>
               <a:rPr lang="en-US" sz="2250" dirty="0" spc="0" kern="0">
